--- a/assets/powerpoints/module-alimentation/A3-ou-regarder-sur-un-emballage.pptx
+++ b/assets/powerpoints/module-alimentation/A3-ou-regarder-sur-un-emballage.pptx
@@ -6829,7 +6829,25 @@
                 </a:solidFill>
                 <a:latin typeface="Verdana"/>
               </a:rPr>
-              <a:t>Une date de &lt;b&gt;qualité&lt;/b&gt;. Après, le goût ou la texture changent, mais l'aliment n'est pas dangereux. On la trouve sur la plupart des produits.</a:t>
+              <a:t>Une date de </a:t>
+            </a:r>
+            <a:r>
+              <a:rPr sz="1500" b="1" i="0">
+                <a:solidFill>
+                  <a:srgbClr val="3A3D40"/>
+                </a:solidFill>
+                <a:latin typeface="Verdana"/>
+              </a:rPr>
+              <a:t>qualité</a:t>
+            </a:r>
+            <a:r>
+              <a:rPr sz="1500" b="0" i="0">
+                <a:solidFill>
+                  <a:srgbClr val="3A3D40"/>
+                </a:solidFill>
+                <a:latin typeface="Verdana"/>
+              </a:rPr>
+              <a:t>. Après, le goût ou la texture changent, mais l'aliment n'est pas dangereux. On la trouve sur la plupart des produits.</a:t>
             </a:r>
           </a:p>
         </p:txBody>
@@ -6953,7 +6971,25 @@
                 </a:solidFill>
                 <a:latin typeface="Verdana"/>
               </a:rPr>
-              <a:t>Une date de &lt;b&gt;sécurité&lt;/b&gt;. Après, on ne consomme pas. Elle est rare : surtout les préparations pour nourrissons et quelques produits frais.</a:t>
+              <a:t>Une date de </a:t>
+            </a:r>
+            <a:r>
+              <a:rPr sz="1500" b="1" i="0">
+                <a:solidFill>
+                  <a:srgbClr val="3A3D40"/>
+                </a:solidFill>
+                <a:latin typeface="Verdana"/>
+              </a:rPr>
+              <a:t>sécurité</a:t>
+            </a:r>
+            <a:r>
+              <a:rPr sz="1500" b="0" i="0">
+                <a:solidFill>
+                  <a:srgbClr val="3A3D40"/>
+                </a:solidFill>
+                <a:latin typeface="Verdana"/>
+              </a:rPr>
+              <a:t>. Après, on ne consomme pas. Elle est rare : surtout les préparations pour nourrissons et quelques produits frais.</a:t>
             </a:r>
           </a:p>
         </p:txBody>
